--- a/media/resources/files/Ekvivalenettuuluk_Kaytalanuuchu_Onduktardy_Bolchokko_UnaaJarysh_zYiN3oH.pptx
+++ b/media/resources/files/Ekvivalenettuuluk_Kaytalanuuchu_Onduktardy_Bolchokko_UnaaJarysh_zYiN3oH.pptx
@@ -13708,7 +13708,7 @@
                 <a:latin typeface="Impact" panose="020B0806030902050204" pitchFamily="34" charset="0"/>
                 <a:ea typeface="굴림" panose="020B0600000101010101" pitchFamily="34" charset="-127"/>
               </a:rPr>
-              <a:t>START</a:t>
+              <a:t>Башта</a:t>
             </a:r>
             <a:endParaRPr lang="en-US" altLang="en-US" sz="8862" dirty="0">
               <a:solidFill>
@@ -15121,7 +15121,7 @@
                 </a:solidFill>
                 <a:latin typeface="Calibri" panose="020F0502020204030204"/>
               </a:rPr>
-              <a:t>Турдуу пикирлер учун ыраазычылык билдиребиз.</a:t>
+              <a:t>Түрдүү пикирлер үчүн ыраазычылык билдиребиз.</a:t>
             </a:r>
           </a:p>
           <a:p>

--- a/media/resources/files/Ekvivalenettuuluk_Kaytalanuuchu_Onduktardy_Bolchokko_UnaaJarysh_zYiN3oH.pptx
+++ b/media/resources/files/Ekvivalenettuuluk_Kaytalanuuchu_Onduktardy_Bolchokko_UnaaJarysh_zYiN3oH.pptx
@@ -3872,7 +3872,7 @@
                 <a:latin typeface="Cambria Math" panose="02040503050406030204" pitchFamily="18" charset="0"/>
                 <a:ea typeface="Cambria Math" panose="02040503050406030204" pitchFamily="18" charset="0"/>
               </a:rPr>
-              <a:t>Суроону тандоо үчүн ак кутучаны басыңыз/тийиңиз. Тиешелүү суроого өтүү үчүн номерди басыңыз.</a:t>
+              <a:t>Суроону тандоо үчүн ак кутучаны басыңыз. Ошол суроого өтүү үчүн номерди басыңыз.</a:t>
             </a:r>
           </a:p>
           <a:p>
@@ -3942,7 +3942,7 @@
                 <a:latin typeface="Cambria Math" panose="02040503050406030204" pitchFamily="18" charset="0"/>
                 <a:ea typeface="Cambria Math" panose="02040503050406030204" pitchFamily="18" charset="0"/>
               </a:rPr>
-              <a:t>Команданын унаасын чыкылдатып, аны бир орун алдыга жылдырыңыз. Жеңүүчү анимация бар</a:t>
+              <a:t>Команданын унаасын басып, бир орун алдыга жылдырыңыз. Жеңгенде анимация чыгат.</a:t>
             </a:r>
           </a:p>
           <a:p>
